--- a/docs/reports/project-status-2026-06-02.pptx
+++ b/docs/reports/project-status-2026-06-02.pptx
@@ -1702,6 +1702,10 @@
             <a:prstDash val="solid"/>
           </a:ln>
         </p:spPr>
+        <p:txBody>
+          <a:bodyPr/>
+          <a:p/>
+        </p:txBody>
       </p:sp>
       <p:sp>
         <p:nvSpPr>
@@ -1731,6 +1735,10 @@
             <a:prstDash val="solid"/>
           </a:ln>
         </p:spPr>
+        <p:txBody>
+          <a:bodyPr/>
+          <a:p/>
+        </p:txBody>
       </p:sp>
       <p:sp>
         <p:nvSpPr>
@@ -1760,6 +1768,10 @@
             <a:prstDash val="solid"/>
           </a:ln>
         </p:spPr>
+        <p:txBody>
+          <a:bodyPr/>
+          <a:p/>
+        </p:txBody>
       </p:sp>
       <p:sp>
         <p:nvSpPr>
@@ -1789,6 +1801,10 @@
             <a:prstDash val="solid"/>
           </a:ln>
         </p:spPr>
+        <p:txBody>
+          <a:bodyPr/>
+          <a:p/>
+        </p:txBody>
       </p:sp>
       <p:sp>
         <p:nvSpPr>
@@ -1818,6 +1834,10 @@
             <a:prstDash val="solid"/>
           </a:ln>
         </p:spPr>
+        <p:txBody>
+          <a:bodyPr/>
+          <a:p/>
+        </p:txBody>
       </p:sp>
       <p:sp>
         <p:nvSpPr>
@@ -1847,6 +1867,10 @@
             <a:prstDash val="solid"/>
           </a:ln>
         </p:spPr>
+        <p:txBody>
+          <a:bodyPr/>
+          <a:p/>
+        </p:txBody>
       </p:sp>
       <p:sp>
         <p:nvSpPr>
@@ -2034,6 +2058,10 @@
             <a:prstDash val="solid"/>
           </a:ln>
         </p:spPr>
+        <p:txBody>
+          <a:bodyPr/>
+          <a:p/>
+        </p:txBody>
       </p:sp>
       <p:sp>
         <p:nvSpPr>
@@ -2182,6 +2210,10 @@
             <a:prstDash val="solid"/>
           </a:ln>
         </p:spPr>
+        <p:txBody>
+          <a:bodyPr/>
+          <a:p/>
+        </p:txBody>
       </p:sp>
       <p:sp>
         <p:nvSpPr>
@@ -2211,6 +2243,10 @@
             <a:prstDash val="solid"/>
           </a:ln>
         </p:spPr>
+        <p:txBody>
+          <a:bodyPr/>
+          <a:p/>
+        </p:txBody>
       </p:sp>
       <p:sp>
         <p:nvSpPr>
@@ -2240,6 +2276,10 @@
             <a:prstDash val="solid"/>
           </a:ln>
         </p:spPr>
+        <p:txBody>
+          <a:bodyPr/>
+          <a:p/>
+        </p:txBody>
       </p:sp>
       <p:sp>
         <p:nvSpPr>
@@ -2338,6 +2378,10 @@
             <a:prstDash val="solid"/>
           </a:ln>
         </p:spPr>
+        <p:txBody>
+          <a:bodyPr/>
+          <a:p/>
+        </p:txBody>
       </p:sp>
       <p:sp>
         <p:nvSpPr>
@@ -2367,6 +2411,10 @@
             <a:prstDash val="solid"/>
           </a:ln>
         </p:spPr>
+        <p:txBody>
+          <a:bodyPr/>
+          <a:p/>
+        </p:txBody>
       </p:sp>
       <p:sp>
         <p:nvSpPr>
@@ -2396,6 +2444,10 @@
             <a:prstDash val="solid"/>
           </a:ln>
         </p:spPr>
+        <p:txBody>
+          <a:bodyPr/>
+          <a:p/>
+        </p:txBody>
       </p:sp>
       <p:sp>
         <p:nvSpPr>
@@ -2425,6 +2477,10 @@
             <a:prstDash val="solid"/>
           </a:ln>
         </p:spPr>
+        <p:txBody>
+          <a:bodyPr/>
+          <a:p/>
+        </p:txBody>
       </p:sp>
       <p:sp>
         <p:nvSpPr>
@@ -2454,6 +2510,10 @@
             <a:prstDash val="solid"/>
           </a:ln>
         </p:spPr>
+        <p:txBody>
+          <a:bodyPr/>
+          <a:p/>
+        </p:txBody>
       </p:sp>
       <p:sp>
         <p:nvSpPr>
@@ -2559,6 +2619,10 @@
             <a:prstDash val="solid"/>
           </a:ln>
         </p:spPr>
+        <p:txBody>
+          <a:bodyPr/>
+          <a:p/>
+        </p:txBody>
       </p:sp>
       <p:sp>
         <p:nvSpPr>
@@ -2705,6 +2769,10 @@
             <a:prstDash val="solid"/>
           </a:ln>
         </p:spPr>
+        <p:txBody>
+          <a:bodyPr/>
+          <a:p/>
+        </p:txBody>
       </p:sp>
       <p:sp>
         <p:nvSpPr>
@@ -2851,6 +2919,10 @@
             <a:prstDash val="solid"/>
           </a:ln>
         </p:spPr>
+        <p:txBody>
+          <a:bodyPr/>
+          <a:p/>
+        </p:txBody>
       </p:sp>
       <p:sp>
         <p:nvSpPr>
@@ -2997,6 +3069,10 @@
             <a:prstDash val="solid"/>
           </a:ln>
         </p:spPr>
+        <p:txBody>
+          <a:bodyPr/>
+          <a:p/>
+        </p:txBody>
       </p:sp>
       <p:sp>
         <p:nvSpPr>
@@ -3143,6 +3219,10 @@
             <a:prstDash val="solid"/>
           </a:ln>
         </p:spPr>
+        <p:txBody>
+          <a:bodyPr/>
+          <a:p/>
+        </p:txBody>
       </p:sp>
       <p:sp>
         <p:nvSpPr>
@@ -3293,6 +3373,10 @@
             <a:prstDash val="solid"/>
           </a:ln>
         </p:spPr>
+        <p:txBody>
+          <a:bodyPr/>
+          <a:p/>
+        </p:txBody>
       </p:sp>
       <p:sp>
         <p:nvSpPr>
@@ -3402,6 +3486,10 @@
             <a:prstDash val="solid"/>
           </a:ln>
         </p:spPr>
+        <p:txBody>
+          <a:bodyPr/>
+          <a:p/>
+        </p:txBody>
       </p:sp>
       <p:sp>
         <p:nvSpPr>
@@ -3500,6 +3588,10 @@
             <a:prstDash val="solid"/>
           </a:ln>
         </p:spPr>
+        <p:txBody>
+          <a:bodyPr/>
+          <a:p/>
+        </p:txBody>
       </p:sp>
       <p:sp>
         <p:nvSpPr>
@@ -3529,6 +3621,10 @@
             <a:prstDash val="solid"/>
           </a:ln>
         </p:spPr>
+        <p:txBody>
+          <a:bodyPr/>
+          <a:p/>
+        </p:txBody>
       </p:sp>
       <p:sp>
         <p:nvSpPr>
@@ -3558,6 +3654,10 @@
             <a:prstDash val="solid"/>
           </a:ln>
         </p:spPr>
+        <p:txBody>
+          <a:bodyPr/>
+          <a:p/>
+        </p:txBody>
       </p:sp>
       <p:sp>
         <p:nvSpPr>
@@ -3587,6 +3687,10 @@
             <a:prstDash val="solid"/>
           </a:ln>
         </p:spPr>
+        <p:txBody>
+          <a:bodyPr/>
+          <a:p/>
+        </p:txBody>
       </p:sp>
       <p:sp>
         <p:nvSpPr>
@@ -3809,6 +3913,10 @@
             <a:prstDash val="solid"/>
           </a:ln>
         </p:spPr>
+        <p:txBody>
+          <a:bodyPr/>
+          <a:p/>
+        </p:txBody>
       </p:sp>
       <p:sp>
         <p:nvSpPr>
@@ -3843,6 +3951,10 @@
             </a:outerShdw>
           </a:effectLst>
         </p:spPr>
+        <p:txBody>
+          <a:bodyPr/>
+          <a:p/>
+        </p:txBody>
       </p:sp>
       <p:sp>
         <p:nvSpPr>
@@ -3870,6 +3982,10 @@
             <a:prstDash val="solid"/>
           </a:ln>
         </p:spPr>
+        <p:txBody>
+          <a:bodyPr/>
+          <a:p/>
+        </p:txBody>
       </p:sp>
       <p:sp>
         <p:nvSpPr>
@@ -4023,6 +4139,10 @@
             </a:outerShdw>
           </a:effectLst>
         </p:spPr>
+        <p:txBody>
+          <a:bodyPr/>
+          <a:p/>
+        </p:txBody>
       </p:sp>
       <p:sp>
         <p:nvSpPr>
@@ -4050,6 +4170,10 @@
             <a:prstDash val="solid"/>
           </a:ln>
         </p:spPr>
+        <p:txBody>
+          <a:bodyPr/>
+          <a:p/>
+        </p:txBody>
       </p:sp>
       <p:sp>
         <p:nvSpPr>
@@ -4203,6 +4327,10 @@
             </a:outerShdw>
           </a:effectLst>
         </p:spPr>
+        <p:txBody>
+          <a:bodyPr/>
+          <a:p/>
+        </p:txBody>
       </p:sp>
       <p:sp>
         <p:nvSpPr>
@@ -4230,6 +4358,10 @@
             <a:prstDash val="solid"/>
           </a:ln>
         </p:spPr>
+        <p:txBody>
+          <a:bodyPr/>
+          <a:p/>
+        </p:txBody>
       </p:sp>
       <p:sp>
         <p:nvSpPr>
@@ -4383,6 +4515,10 @@
             </a:outerShdw>
           </a:effectLst>
         </p:spPr>
+        <p:txBody>
+          <a:bodyPr/>
+          <a:p/>
+        </p:txBody>
       </p:sp>
       <p:sp>
         <p:nvSpPr>
@@ -4410,6 +4546,10 @@
             <a:prstDash val="solid"/>
           </a:ln>
         </p:spPr>
+        <p:txBody>
+          <a:bodyPr/>
+          <a:p/>
+        </p:txBody>
       </p:sp>
       <p:sp>
         <p:nvSpPr>
@@ -4556,6 +4696,10 @@
             <a:prstDash val="solid"/>
           </a:ln>
         </p:spPr>
+        <p:txBody>
+          <a:bodyPr/>
+          <a:p/>
+        </p:txBody>
       </p:sp>
       <p:sp>
         <p:nvSpPr>
@@ -4665,6 +4809,10 @@
             <a:prstDash val="solid"/>
           </a:ln>
         </p:spPr>
+        <p:txBody>
+          <a:bodyPr/>
+          <a:p/>
+        </p:txBody>
       </p:sp>
       <p:sp>
         <p:nvSpPr>
@@ -4733,6 +4881,10 @@
             <a:prstDash val="solid"/>
           </a:ln>
         </p:spPr>
+        <p:txBody>
+          <a:bodyPr/>
+          <a:p/>
+        </p:txBody>
       </p:sp>
       <p:sp>
         <p:nvSpPr>
@@ -4801,6 +4953,10 @@
             <a:prstDash val="solid"/>
           </a:ln>
         </p:spPr>
+        <p:txBody>
+          <a:bodyPr/>
+          <a:p/>
+        </p:txBody>
       </p:sp>
       <p:sp>
         <p:nvSpPr>
@@ -4899,6 +5055,10 @@
             <a:prstDash val="solid"/>
           </a:ln>
         </p:spPr>
+        <p:txBody>
+          <a:bodyPr/>
+          <a:p/>
+        </p:txBody>
       </p:sp>
       <p:sp>
         <p:nvSpPr>
@@ -4928,6 +5088,10 @@
             <a:prstDash val="solid"/>
           </a:ln>
         </p:spPr>
+        <p:txBody>
+          <a:bodyPr/>
+          <a:p/>
+        </p:txBody>
       </p:sp>
       <p:sp>
         <p:nvSpPr>
@@ -4957,6 +5121,10 @@
             <a:prstDash val="solid"/>
           </a:ln>
         </p:spPr>
+        <p:txBody>
+          <a:bodyPr/>
+          <a:p/>
+        </p:txBody>
       </p:sp>
       <p:sp>
         <p:nvSpPr>
@@ -4986,6 +5154,10 @@
             <a:prstDash val="solid"/>
           </a:ln>
         </p:spPr>
+        <p:txBody>
+          <a:bodyPr/>
+          <a:p/>
+        </p:txBody>
       </p:sp>
       <p:sp>
         <p:nvSpPr>
@@ -5208,6 +5380,10 @@
             <a:prstDash val="solid"/>
           </a:ln>
         </p:spPr>
+        <p:txBody>
+          <a:bodyPr/>
+          <a:p/>
+        </p:txBody>
       </p:sp>
       <p:sp>
         <p:nvSpPr>
@@ -5242,6 +5418,10 @@
             </a:outerShdw>
           </a:effectLst>
         </p:spPr>
+        <p:txBody>
+          <a:bodyPr/>
+          <a:p/>
+        </p:txBody>
       </p:sp>
       <p:sp>
         <p:nvSpPr>
@@ -5269,6 +5449,10 @@
             <a:prstDash val="solid"/>
           </a:ln>
         </p:spPr>
+        <p:txBody>
+          <a:bodyPr/>
+          <a:p/>
+        </p:txBody>
       </p:sp>
       <p:sp>
         <p:nvSpPr>
@@ -5374,6 +5558,10 @@
             <a:prstDash val="solid"/>
           </a:ln>
         </p:spPr>
+        <p:txBody>
+          <a:bodyPr/>
+          <a:p/>
+        </p:txBody>
       </p:sp>
       <p:sp>
         <p:nvSpPr>
@@ -5442,6 +5630,10 @@
             <a:prstDash val="solid"/>
           </a:ln>
         </p:spPr>
+        <p:txBody>
+          <a:bodyPr/>
+          <a:p/>
+        </p:txBody>
       </p:sp>
       <p:sp>
         <p:nvSpPr>
@@ -5510,6 +5702,10 @@
             <a:prstDash val="solid"/>
           </a:ln>
         </p:spPr>
+        <p:txBody>
+          <a:bodyPr/>
+          <a:p/>
+        </p:txBody>
       </p:sp>
       <p:sp>
         <p:nvSpPr>
@@ -5578,6 +5774,10 @@
             <a:prstDash val="solid"/>
           </a:ln>
         </p:spPr>
+        <p:txBody>
+          <a:bodyPr/>
+          <a:p/>
+        </p:txBody>
       </p:sp>
       <p:sp>
         <p:nvSpPr>
@@ -5648,6 +5848,10 @@
             <a:prstDash val="solid"/>
           </a:ln>
         </p:spPr>
+        <p:txBody>
+          <a:bodyPr/>
+          <a:p/>
+        </p:txBody>
       </p:sp>
       <p:sp>
         <p:nvSpPr>
@@ -5721,6 +5925,10 @@
             </a:outerShdw>
           </a:effectLst>
         </p:spPr>
+        <p:txBody>
+          <a:bodyPr/>
+          <a:p/>
+        </p:txBody>
       </p:sp>
       <p:sp>
         <p:nvSpPr>
@@ -5748,6 +5956,10 @@
             <a:prstDash val="solid"/>
           </a:ln>
         </p:spPr>
+        <p:txBody>
+          <a:bodyPr/>
+          <a:p/>
+        </p:txBody>
       </p:sp>
       <p:sp>
         <p:nvSpPr>
@@ -5853,6 +6065,10 @@
             <a:prstDash val="solid"/>
           </a:ln>
         </p:spPr>
+        <p:txBody>
+          <a:bodyPr/>
+          <a:p/>
+        </p:txBody>
       </p:sp>
       <p:sp>
         <p:nvSpPr>
@@ -5921,6 +6137,10 @@
             <a:prstDash val="solid"/>
           </a:ln>
         </p:spPr>
+        <p:txBody>
+          <a:bodyPr/>
+          <a:p/>
+        </p:txBody>
       </p:sp>
       <p:sp>
         <p:nvSpPr>
@@ -5989,6 +6209,10 @@
             <a:prstDash val="solid"/>
           </a:ln>
         </p:spPr>
+        <p:txBody>
+          <a:bodyPr/>
+          <a:p/>
+        </p:txBody>
       </p:sp>
       <p:sp>
         <p:nvSpPr>
@@ -6057,6 +6281,10 @@
             <a:prstDash val="solid"/>
           </a:ln>
         </p:spPr>
+        <p:txBody>
+          <a:bodyPr/>
+          <a:p/>
+        </p:txBody>
       </p:sp>
       <p:sp>
         <p:nvSpPr>
@@ -6127,6 +6355,10 @@
             <a:prstDash val="solid"/>
           </a:ln>
         </p:spPr>
+        <p:txBody>
+          <a:bodyPr/>
+          <a:p/>
+        </p:txBody>
       </p:sp>
       <p:sp>
         <p:nvSpPr>
@@ -6200,6 +6432,10 @@
             </a:outerShdw>
           </a:effectLst>
         </p:spPr>
+        <p:txBody>
+          <a:bodyPr/>
+          <a:p/>
+        </p:txBody>
       </p:sp>
       <p:sp>
         <p:nvSpPr>
@@ -6227,6 +6463,10 @@
             <a:prstDash val="solid"/>
           </a:ln>
         </p:spPr>
+        <p:txBody>
+          <a:bodyPr/>
+          <a:p/>
+        </p:txBody>
       </p:sp>
       <p:sp>
         <p:nvSpPr>
@@ -6332,6 +6572,10 @@
             <a:prstDash val="solid"/>
           </a:ln>
         </p:spPr>
+        <p:txBody>
+          <a:bodyPr/>
+          <a:p/>
+        </p:txBody>
       </p:sp>
       <p:sp>
         <p:nvSpPr>
@@ -6400,6 +6644,10 @@
             <a:prstDash val="solid"/>
           </a:ln>
         </p:spPr>
+        <p:txBody>
+          <a:bodyPr/>
+          <a:p/>
+        </p:txBody>
       </p:sp>
       <p:sp>
         <p:nvSpPr>
@@ -6468,6 +6716,10 @@
             <a:prstDash val="solid"/>
           </a:ln>
         </p:spPr>
+        <p:txBody>
+          <a:bodyPr/>
+          <a:p/>
+        </p:txBody>
       </p:sp>
       <p:sp>
         <p:nvSpPr>
@@ -6536,6 +6788,10 @@
             <a:prstDash val="solid"/>
           </a:ln>
         </p:spPr>
+        <p:txBody>
+          <a:bodyPr/>
+          <a:p/>
+        </p:txBody>
       </p:sp>
       <p:sp>
         <p:nvSpPr>
@@ -6606,6 +6862,10 @@
             <a:prstDash val="solid"/>
           </a:ln>
         </p:spPr>
+        <p:txBody>
+          <a:bodyPr/>
+          <a:p/>
+        </p:txBody>
       </p:sp>
       <p:sp>
         <p:nvSpPr>
@@ -6672,6 +6932,10 @@
             <a:prstDash val="solid"/>
           </a:ln>
         </p:spPr>
+        <p:txBody>
+          <a:bodyPr/>
+          <a:p/>
+        </p:txBody>
       </p:sp>
       <p:sp>
         <p:nvSpPr>
@@ -6699,6 +6963,10 @@
             <a:prstDash val="solid"/>
           </a:ln>
         </p:spPr>
+        <p:txBody>
+          <a:bodyPr/>
+          <a:p/>
+        </p:txBody>
       </p:sp>
     </p:spTree>
   </p:cSld>
@@ -6758,6 +7026,10 @@
             <a:prstDash val="solid"/>
           </a:ln>
         </p:spPr>
+        <p:txBody>
+          <a:bodyPr/>
+          <a:p/>
+        </p:txBody>
       </p:sp>
       <p:sp>
         <p:nvSpPr>
@@ -6787,6 +7059,10 @@
             <a:prstDash val="solid"/>
           </a:ln>
         </p:spPr>
+        <p:txBody>
+          <a:bodyPr/>
+          <a:p/>
+        </p:txBody>
       </p:sp>
       <p:sp>
         <p:nvSpPr>
@@ -6816,6 +7092,10 @@
             <a:prstDash val="solid"/>
           </a:ln>
         </p:spPr>
+        <p:txBody>
+          <a:bodyPr/>
+          <a:p/>
+        </p:txBody>
       </p:sp>
       <p:sp>
         <p:nvSpPr>
@@ -6845,6 +7125,10 @@
             <a:prstDash val="solid"/>
           </a:ln>
         </p:spPr>
+        <p:txBody>
+          <a:bodyPr/>
+          <a:p/>
+        </p:txBody>
       </p:sp>
       <p:sp>
         <p:nvSpPr>
@@ -7067,6 +7351,10 @@
             <a:prstDash val="solid"/>
           </a:ln>
         </p:spPr>
+        <p:txBody>
+          <a:bodyPr/>
+          <a:p/>
+        </p:txBody>
       </p:sp>
       <p:sp>
         <p:nvSpPr>
@@ -7103,6 +7391,10 @@
             </a:outerShdw>
           </a:effectLst>
         </p:spPr>
+        <p:txBody>
+          <a:bodyPr/>
+          <a:p/>
+        </p:txBody>
       </p:sp>
       <p:sp>
         <p:nvSpPr>
@@ -7130,6 +7422,10 @@
             <a:prstDash val="solid"/>
           </a:ln>
         </p:spPr>
+        <p:txBody>
+          <a:bodyPr/>
+          <a:p/>
+        </p:txBody>
       </p:sp>
       <p:sp>
         <p:nvSpPr>
@@ -7159,6 +7455,10 @@
             <a:prstDash val="solid"/>
           </a:ln>
         </p:spPr>
+        <p:txBody>
+          <a:bodyPr/>
+          <a:p/>
+        </p:txBody>
       </p:sp>
       <p:sp>
         <p:nvSpPr>
@@ -7314,6 +7614,10 @@
             </a:outerShdw>
           </a:effectLst>
         </p:spPr>
+        <p:txBody>
+          <a:bodyPr/>
+          <a:p/>
+        </p:txBody>
       </p:sp>
       <p:sp>
         <p:nvSpPr>
@@ -7341,6 +7645,10 @@
             <a:prstDash val="solid"/>
           </a:ln>
         </p:spPr>
+        <p:txBody>
+          <a:bodyPr/>
+          <a:p/>
+        </p:txBody>
       </p:sp>
       <p:sp>
         <p:nvSpPr>
@@ -7370,6 +7678,10 @@
             <a:prstDash val="solid"/>
           </a:ln>
         </p:spPr>
+        <p:txBody>
+          <a:bodyPr/>
+          <a:p/>
+        </p:txBody>
       </p:sp>
       <p:sp>
         <p:nvSpPr>
@@ -7525,6 +7837,10 @@
             </a:outerShdw>
           </a:effectLst>
         </p:spPr>
+        <p:txBody>
+          <a:bodyPr/>
+          <a:p/>
+        </p:txBody>
       </p:sp>
       <p:sp>
         <p:nvSpPr>
@@ -7552,6 +7868,10 @@
             <a:prstDash val="solid"/>
           </a:ln>
         </p:spPr>
+        <p:txBody>
+          <a:bodyPr/>
+          <a:p/>
+        </p:txBody>
       </p:sp>
       <p:sp>
         <p:nvSpPr>
@@ -7581,6 +7901,10 @@
             <a:prstDash val="solid"/>
           </a:ln>
         </p:spPr>
+        <p:txBody>
+          <a:bodyPr/>
+          <a:p/>
+        </p:txBody>
       </p:sp>
       <p:sp>
         <p:nvSpPr>
@@ -7736,6 +8060,10 @@
             </a:outerShdw>
           </a:effectLst>
         </p:spPr>
+        <p:txBody>
+          <a:bodyPr/>
+          <a:p/>
+        </p:txBody>
       </p:sp>
       <p:sp>
         <p:nvSpPr>
@@ -7763,6 +8091,10 @@
             <a:prstDash val="solid"/>
           </a:ln>
         </p:spPr>
+        <p:txBody>
+          <a:bodyPr/>
+          <a:p/>
+        </p:txBody>
       </p:sp>
       <p:sp>
         <p:nvSpPr>
@@ -7792,6 +8124,10 @@
             <a:prstDash val="solid"/>
           </a:ln>
         </p:spPr>
+        <p:txBody>
+          <a:bodyPr/>
+          <a:p/>
+        </p:txBody>
       </p:sp>
       <p:sp>
         <p:nvSpPr>
@@ -7940,6 +8276,10 @@
             <a:prstDash val="solid"/>
           </a:ln>
         </p:spPr>
+        <p:txBody>
+          <a:bodyPr/>
+          <a:p/>
+        </p:txBody>
       </p:sp>
       <p:sp>
         <p:nvSpPr>
@@ -8038,6 +8378,10 @@
             <a:prstDash val="solid"/>
           </a:ln>
         </p:spPr>
+        <p:txBody>
+          <a:bodyPr/>
+          <a:p/>
+        </p:txBody>
       </p:sp>
       <p:sp>
         <p:nvSpPr>
@@ -8067,6 +8411,10 @@
             <a:prstDash val="solid"/>
           </a:ln>
         </p:spPr>
+        <p:txBody>
+          <a:bodyPr/>
+          <a:p/>
+        </p:txBody>
       </p:sp>
       <p:sp>
         <p:nvSpPr>
@@ -8096,6 +8444,10 @@
             <a:prstDash val="solid"/>
           </a:ln>
         </p:spPr>
+        <p:txBody>
+          <a:bodyPr/>
+          <a:p/>
+        </p:txBody>
       </p:sp>
       <p:sp>
         <p:nvSpPr>
@@ -8125,6 +8477,10 @@
             <a:prstDash val="solid"/>
           </a:ln>
         </p:spPr>
+        <p:txBody>
+          <a:bodyPr/>
+          <a:p/>
+        </p:txBody>
       </p:sp>
       <p:sp>
         <p:nvSpPr>
@@ -8347,6 +8703,10 @@
             <a:prstDash val="solid"/>
           </a:ln>
         </p:spPr>
+        <p:txBody>
+          <a:bodyPr/>
+          <a:p/>
+        </p:txBody>
       </p:sp>
       <p:sp>
         <p:nvSpPr>
@@ -8372,6 +8732,10 @@
             <a:prstDash val="solid"/>
           </a:ln>
         </p:spPr>
+        <p:txBody>
+          <a:bodyPr/>
+          <a:p/>
+        </p:txBody>
       </p:sp>
       <p:sp>
         <p:nvSpPr>
@@ -8399,6 +8763,10 @@
             <a:prstDash val="solid"/>
           </a:ln>
         </p:spPr>
+        <p:txBody>
+          <a:bodyPr/>
+          <a:p/>
+        </p:txBody>
       </p:sp>
       <p:sp>
         <p:nvSpPr>
@@ -8511,6 +8879,10 @@
             </a:outerShdw>
           </a:effectLst>
         </p:spPr>
+        <p:txBody>
+          <a:bodyPr/>
+          <a:p/>
+        </p:txBody>
       </p:sp>
       <p:sp>
         <p:nvSpPr>
@@ -8618,6 +8990,10 @@
             <a:prstDash val="solid"/>
           </a:ln>
         </p:spPr>
+        <p:txBody>
+          <a:bodyPr/>
+          <a:p/>
+        </p:txBody>
       </p:sp>
       <p:sp>
         <p:nvSpPr>
@@ -8645,6 +9021,10 @@
             <a:prstDash val="solid"/>
           </a:ln>
         </p:spPr>
+        <p:txBody>
+          <a:bodyPr/>
+          <a:p/>
+        </p:txBody>
       </p:sp>
       <p:sp>
         <p:nvSpPr>
@@ -8757,6 +9137,10 @@
             </a:outerShdw>
           </a:effectLst>
         </p:spPr>
+        <p:txBody>
+          <a:bodyPr/>
+          <a:p/>
+        </p:txBody>
       </p:sp>
       <p:sp>
         <p:nvSpPr>
@@ -8864,6 +9248,10 @@
             <a:prstDash val="solid"/>
           </a:ln>
         </p:spPr>
+        <p:txBody>
+          <a:bodyPr/>
+          <a:p/>
+        </p:txBody>
       </p:sp>
       <p:sp>
         <p:nvSpPr>
@@ -8891,6 +9279,10 @@
             <a:prstDash val="solid"/>
           </a:ln>
         </p:spPr>
+        <p:txBody>
+          <a:bodyPr/>
+          <a:p/>
+        </p:txBody>
       </p:sp>
       <p:sp>
         <p:nvSpPr>
@@ -9003,6 +9395,10 @@
             </a:outerShdw>
           </a:effectLst>
         </p:spPr>
+        <p:txBody>
+          <a:bodyPr/>
+          <a:p/>
+        </p:txBody>
       </p:sp>
       <p:sp>
         <p:nvSpPr>
@@ -9110,6 +9506,10 @@
             <a:prstDash val="solid"/>
           </a:ln>
         </p:spPr>
+        <p:txBody>
+          <a:bodyPr/>
+          <a:p/>
+        </p:txBody>
       </p:sp>
       <p:sp>
         <p:nvSpPr>
@@ -9222,6 +9622,10 @@
             </a:outerShdw>
           </a:effectLst>
         </p:spPr>
+        <p:txBody>
+          <a:bodyPr/>
+          <a:p/>
+        </p:txBody>
       </p:sp>
       <p:sp>
         <p:nvSpPr>
@@ -9331,6 +9735,10 @@
             <a:prstDash val="solid"/>
           </a:ln>
         </p:spPr>
+        <p:txBody>
+          <a:bodyPr/>
+          <a:p/>
+        </p:txBody>
       </p:sp>
       <p:sp>
         <p:nvSpPr>
@@ -9429,6 +9837,10 @@
             <a:prstDash val="solid"/>
           </a:ln>
         </p:spPr>
+        <p:txBody>
+          <a:bodyPr/>
+          <a:p/>
+        </p:txBody>
       </p:sp>
       <p:sp>
         <p:nvSpPr>
@@ -9458,6 +9870,10 @@
             <a:prstDash val="solid"/>
           </a:ln>
         </p:spPr>
+        <p:txBody>
+          <a:bodyPr/>
+          <a:p/>
+        </p:txBody>
       </p:sp>
       <p:sp>
         <p:nvSpPr>
@@ -9487,6 +9903,10 @@
             <a:prstDash val="solid"/>
           </a:ln>
         </p:spPr>
+        <p:txBody>
+          <a:bodyPr/>
+          <a:p/>
+        </p:txBody>
       </p:sp>
       <p:sp>
         <p:nvSpPr>
@@ -9516,6 +9936,10 @@
             <a:prstDash val="solid"/>
           </a:ln>
         </p:spPr>
+        <p:txBody>
+          <a:bodyPr/>
+          <a:p/>
+        </p:txBody>
       </p:sp>
       <p:sp>
         <p:nvSpPr>
@@ -9738,6 +10162,10 @@
             <a:prstDash val="solid"/>
           </a:ln>
         </p:spPr>
+        <p:txBody>
+          <a:bodyPr/>
+          <a:p/>
+        </p:txBody>
       </p:sp>
       <p:sp>
         <p:nvSpPr>
@@ -9772,6 +10200,10 @@
             </a:outerShdw>
           </a:effectLst>
         </p:spPr>
+        <p:txBody>
+          <a:bodyPr/>
+          <a:p/>
+        </p:txBody>
       </p:sp>
       <p:sp>
         <p:nvSpPr>
@@ -9845,6 +10277,10 @@
             </a:outerShdw>
           </a:effectLst>
         </p:spPr>
+        <p:txBody>
+          <a:bodyPr/>
+          <a:p/>
+        </p:txBody>
       </p:sp>
       <p:sp>
         <p:nvSpPr>
@@ -9872,6 +10308,10 @@
             <a:prstDash val="solid"/>
           </a:ln>
         </p:spPr>
+        <p:txBody>
+          <a:bodyPr/>
+          <a:p/>
+        </p:txBody>
       </p:sp>
       <p:sp>
         <p:nvSpPr>
@@ -10025,6 +10465,10 @@
             </a:outerShdw>
           </a:effectLst>
         </p:spPr>
+        <p:txBody>
+          <a:bodyPr/>
+          <a:p/>
+        </p:txBody>
       </p:sp>
       <p:sp>
         <p:nvSpPr>
@@ -10052,6 +10496,10 @@
             <a:prstDash val="solid"/>
           </a:ln>
         </p:spPr>
+        <p:txBody>
+          <a:bodyPr/>
+          <a:p/>
+        </p:txBody>
       </p:sp>
       <p:sp>
         <p:nvSpPr>
@@ -10078,7 +10526,7 @@
               <a:buNone/>
             </a:pPr>
             <a:r>
-              <a:rPr lang="en-US" sz="3300" b="1" dirty="0">
+              <a:rPr lang="en-US" sz="2500" b="1" dirty="0">
                 <a:solidFill>
                   <a:srgbClr val="10B981"/>
                 </a:solidFill>
@@ -10086,7 +10534,7 @@
                 <a:ea typeface="Georgia" pitchFamily="34" charset="-122"/>
                 <a:cs typeface="Georgia" pitchFamily="34" charset="-120"/>
               </a:rPr>
-              <a:t>+1617</a:t>
+              <a:t>+1.6k</a:t>
             </a:r>
             <a:endParaRPr lang="en-US" sz="3300" dirty="0"/>
           </a:p>
@@ -10205,6 +10653,10 @@
             </a:outerShdw>
           </a:effectLst>
         </p:spPr>
+        <p:txBody>
+          <a:bodyPr/>
+          <a:p/>
+        </p:txBody>
       </p:sp>
       <p:sp>
         <p:nvSpPr>
@@ -10232,6 +10684,10 @@
             <a:prstDash val="solid"/>
           </a:ln>
         </p:spPr>
+        <p:txBody>
+          <a:bodyPr/>
+          <a:p/>
+        </p:txBody>
       </p:sp>
       <p:sp>
         <p:nvSpPr>
@@ -10242,7 +10698,7 @@
         <p:spPr>
           <a:xfrm>
             <a:off x="4599432" y="2542032"/>
-            <a:ext cx="484632" cy="530352"/>
+            <a:ext cx="822960" cy="530352"/>
           </a:xfrm>
           <a:prstGeom prst="rect">
             <a:avLst/>
@@ -10258,7 +10714,7 @@
               <a:buNone/>
             </a:pPr>
             <a:r>
-              <a:rPr lang="en-US" sz="3300" b="1" dirty="0">
+              <a:rPr lang="en-US" sz="2200" b="1" dirty="0">
                 <a:solidFill>
                   <a:srgbClr val="F59E0B"/>
                 </a:solidFill>
@@ -10266,7 +10722,7 @@
                 <a:ea typeface="Georgia" pitchFamily="34" charset="-122"/>
                 <a:cs typeface="Georgia" pitchFamily="34" charset="-120"/>
               </a:rPr>
-              <a:t>-1517</a:t>
+              <a:t>1.5k</a:t>
             </a:r>
             <a:endParaRPr lang="en-US" sz="3300" dirty="0"/>
           </a:p>
@@ -10378,6 +10834,10 @@
             <a:prstDash val="solid"/>
           </a:ln>
         </p:spPr>
+        <p:txBody>
+          <a:bodyPr/>
+          <a:p/>
+        </p:txBody>
       </p:sp>
       <p:sp>
         <p:nvSpPr>
@@ -10446,6 +10906,10 @@
             <a:prstDash val="solid"/>
           </a:ln>
         </p:spPr>
+        <p:txBody>
+          <a:bodyPr/>
+          <a:p/>
+        </p:txBody>
       </p:sp>
       <p:sp>
         <p:nvSpPr>
@@ -10514,6 +10978,10 @@
             <a:prstDash val="solid"/>
           </a:ln>
         </p:spPr>
+        <p:txBody>
+          <a:bodyPr/>
+          <a:p/>
+        </p:txBody>
       </p:sp>
       <p:sp>
         <p:nvSpPr>
@@ -10582,6 +11050,10 @@
             <a:prstDash val="solid"/>
           </a:ln>
         </p:spPr>
+        <p:txBody>
+          <a:bodyPr/>
+          <a:p/>
+        </p:txBody>
       </p:sp>
       <p:sp>
         <p:nvSpPr>
@@ -10648,6 +11120,10 @@
             <a:prstDash val="solid"/>
           </a:ln>
         </p:spPr>
+        <p:txBody>
+          <a:bodyPr/>
+          <a:p/>
+        </p:txBody>
       </p:sp>
       <p:sp>
         <p:nvSpPr>
@@ -10714,6 +11190,10 @@
             <a:prstDash val="solid"/>
           </a:ln>
         </p:spPr>
+        <p:txBody>
+          <a:bodyPr/>
+          <a:p/>
+        </p:txBody>
       </p:sp>
       <p:sp>
         <p:nvSpPr>
@@ -10743,6 +11223,10 @@
             <a:prstDash val="solid"/>
           </a:ln>
         </p:spPr>
+        <p:txBody>
+          <a:bodyPr/>
+          <a:p/>
+        </p:txBody>
       </p:sp>
       <p:sp>
         <p:nvSpPr>
@@ -10809,6 +11293,10 @@
             <a:prstDash val="solid"/>
           </a:ln>
         </p:spPr>
+        <p:txBody>
+          <a:bodyPr/>
+          <a:p/>
+        </p:txBody>
       </p:sp>
       <p:sp>
         <p:nvSpPr>
@@ -10875,6 +11363,10 @@
             <a:prstDash val="solid"/>
           </a:ln>
         </p:spPr>
+        <p:txBody>
+          <a:bodyPr/>
+          <a:p/>
+        </p:txBody>
       </p:sp>
       <p:sp>
         <p:nvSpPr>
@@ -10904,6 +11396,10 @@
             <a:prstDash val="solid"/>
           </a:ln>
         </p:spPr>
+        <p:txBody>
+          <a:bodyPr/>
+          <a:p/>
+        </p:txBody>
       </p:sp>
       <p:sp>
         <p:nvSpPr>
@@ -10970,6 +11466,10 @@
             <a:prstDash val="solid"/>
           </a:ln>
         </p:spPr>
+        <p:txBody>
+          <a:bodyPr/>
+          <a:p/>
+        </p:txBody>
       </p:sp>
       <p:sp>
         <p:nvSpPr>
@@ -11036,6 +11536,10 @@
             <a:prstDash val="solid"/>
           </a:ln>
         </p:spPr>
+        <p:txBody>
+          <a:bodyPr/>
+          <a:p/>
+        </p:txBody>
       </p:sp>
       <p:sp>
         <p:nvSpPr>
@@ -11065,6 +11569,10 @@
             <a:prstDash val="solid"/>
           </a:ln>
         </p:spPr>
+        <p:txBody>
+          <a:bodyPr/>
+          <a:p/>
+        </p:txBody>
       </p:sp>
       <p:sp>
         <p:nvSpPr>
@@ -11131,6 +11639,10 @@
             <a:prstDash val="solid"/>
           </a:ln>
         </p:spPr>
+        <p:txBody>
+          <a:bodyPr/>
+          <a:p/>
+        </p:txBody>
       </p:sp>
       <p:sp>
         <p:nvSpPr>
@@ -11197,6 +11709,10 @@
             <a:prstDash val="solid"/>
           </a:ln>
         </p:spPr>
+        <p:txBody>
+          <a:bodyPr/>
+          <a:p/>
+        </p:txBody>
       </p:sp>
       <p:sp>
         <p:nvSpPr>
@@ -11226,6 +11742,10 @@
             <a:prstDash val="solid"/>
           </a:ln>
         </p:spPr>
+        <p:txBody>
+          <a:bodyPr/>
+          <a:p/>
+        </p:txBody>
       </p:sp>
       <p:sp>
         <p:nvSpPr>
@@ -11363,6 +11883,10 @@
             <a:prstDash val="solid"/>
           </a:ln>
         </p:spPr>
+        <p:txBody>
+          <a:bodyPr/>
+          <a:p/>
+        </p:txBody>
       </p:sp>
       <p:sp>
         <p:nvSpPr>
@@ -11392,6 +11916,10 @@
             <a:prstDash val="solid"/>
           </a:ln>
         </p:spPr>
+        <p:txBody>
+          <a:bodyPr/>
+          <a:p/>
+        </p:txBody>
       </p:sp>
       <p:sp>
         <p:nvSpPr>
@@ -11421,6 +11949,10 @@
             <a:prstDash val="solid"/>
           </a:ln>
         </p:spPr>
+        <p:txBody>
+          <a:bodyPr/>
+          <a:p/>
+        </p:txBody>
       </p:sp>
       <p:sp>
         <p:nvSpPr>
@@ -11450,6 +11982,10 @@
             <a:prstDash val="solid"/>
           </a:ln>
         </p:spPr>
+        <p:txBody>
+          <a:bodyPr/>
+          <a:p/>
+        </p:txBody>
       </p:sp>
       <p:sp>
         <p:nvSpPr>
@@ -11672,6 +12208,10 @@
             <a:prstDash val="solid"/>
           </a:ln>
         </p:spPr>
+        <p:txBody>
+          <a:bodyPr/>
+          <a:p/>
+        </p:txBody>
       </p:sp>
       <p:sp>
         <p:nvSpPr>
@@ -11706,6 +12246,10 @@
             </a:outerShdw>
           </a:effectLst>
         </p:spPr>
+        <p:txBody>
+          <a:bodyPr/>
+          <a:p/>
+        </p:txBody>
       </p:sp>
       <p:sp>
         <p:nvSpPr>
@@ -11735,6 +12279,10 @@
             <a:prstDash val="solid"/>
           </a:ln>
         </p:spPr>
+        <p:txBody>
+          <a:bodyPr/>
+          <a:p/>
+        </p:txBody>
       </p:sp>
       <p:sp>
         <p:nvSpPr>
@@ -11883,6 +12431,10 @@
             <a:prstDash val="solid"/>
           </a:ln>
         </p:spPr>
+        <p:txBody>
+          <a:bodyPr/>
+          <a:p/>
+        </p:txBody>
       </p:sp>
       <p:sp>
         <p:nvSpPr>
@@ -12031,6 +12583,10 @@
             <a:prstDash val="solid"/>
           </a:ln>
         </p:spPr>
+        <p:txBody>
+          <a:bodyPr/>
+          <a:p/>
+        </p:txBody>
       </p:sp>
       <p:sp>
         <p:nvSpPr>
@@ -12179,6 +12735,10 @@
             <a:prstDash val="solid"/>
           </a:ln>
         </p:spPr>
+        <p:txBody>
+          <a:bodyPr/>
+          <a:p/>
+        </p:txBody>
       </p:sp>
       <p:sp>
         <p:nvSpPr>
@@ -12327,6 +12887,10 @@
             <a:prstDash val="solid"/>
           </a:ln>
         </p:spPr>
+        <p:txBody>
+          <a:bodyPr/>
+          <a:p/>
+        </p:txBody>
       </p:sp>
       <p:sp>
         <p:nvSpPr>
@@ -12473,6 +13037,10 @@
             <a:prstDash val="solid"/>
           </a:ln>
         </p:spPr>
+        <p:txBody>
+          <a:bodyPr/>
+          <a:p/>
+        </p:txBody>
       </p:sp>
       <p:sp>
         <p:nvSpPr>
@@ -12582,6 +13150,10 @@
             <a:prstDash val="solid"/>
           </a:ln>
         </p:spPr>
+        <p:txBody>
+          <a:bodyPr/>
+          <a:p/>
+        </p:txBody>
       </p:sp>
       <p:sp>
         <p:nvSpPr>
@@ -12721,6 +13293,10 @@
             <a:prstDash val="solid"/>
           </a:ln>
         </p:spPr>
+        <p:txBody>
+          <a:bodyPr/>
+          <a:p/>
+        </p:txBody>
       </p:sp>
       <p:sp>
         <p:nvSpPr>
@@ -12750,6 +13326,10 @@
             <a:prstDash val="solid"/>
           </a:ln>
         </p:spPr>
+        <p:txBody>
+          <a:bodyPr/>
+          <a:p/>
+        </p:txBody>
       </p:sp>
       <p:sp>
         <p:nvSpPr>
@@ -12779,6 +13359,10 @@
             <a:prstDash val="solid"/>
           </a:ln>
         </p:spPr>
+        <p:txBody>
+          <a:bodyPr/>
+          <a:p/>
+        </p:txBody>
       </p:sp>
       <p:sp>
         <p:nvSpPr>
@@ -12808,6 +13392,10 @@
             <a:prstDash val="solid"/>
           </a:ln>
         </p:spPr>
+        <p:txBody>
+          <a:bodyPr/>
+          <a:p/>
+        </p:txBody>
       </p:sp>
       <p:sp>
         <p:nvSpPr>
@@ -13030,6 +13618,10 @@
             <a:prstDash val="solid"/>
           </a:ln>
         </p:spPr>
+        <p:txBody>
+          <a:bodyPr/>
+          <a:p/>
+        </p:txBody>
       </p:sp>
       <p:sp>
         <p:nvSpPr>
@@ -13064,6 +13656,10 @@
             </a:outerShdw>
           </a:effectLst>
         </p:spPr>
+        <p:txBody>
+          <a:bodyPr/>
+          <a:p/>
+        </p:txBody>
       </p:sp>
       <p:sp>
         <p:nvSpPr>
@@ -13091,6 +13687,10 @@
             <a:prstDash val="solid"/>
           </a:ln>
         </p:spPr>
+        <p:txBody>
+          <a:bodyPr/>
+          <a:p/>
+        </p:txBody>
       </p:sp>
       <p:sp>
         <p:nvSpPr>
@@ -13244,6 +13844,10 @@
             </a:outerShdw>
           </a:effectLst>
         </p:spPr>
+        <p:txBody>
+          <a:bodyPr/>
+          <a:p/>
+        </p:txBody>
       </p:sp>
       <p:sp>
         <p:nvSpPr>
@@ -13271,6 +13875,10 @@
             <a:prstDash val="solid"/>
           </a:ln>
         </p:spPr>
+        <p:txBody>
+          <a:bodyPr/>
+          <a:p/>
+        </p:txBody>
       </p:sp>
       <p:sp>
         <p:nvSpPr>
@@ -13305,7 +13913,7 @@
                 <a:ea typeface="Georgia" pitchFamily="34" charset="-122"/>
                 <a:cs typeface="Georgia" pitchFamily="34" charset="-120"/>
               </a:rPr>
-              <a:t>8124/25/27</a:t>
+              <a:t>3</a:t>
             </a:r>
             <a:endParaRPr lang="en-US" sz="3300" dirty="0"/>
           </a:p>
@@ -13424,6 +14032,10 @@
             </a:outerShdw>
           </a:effectLst>
         </p:spPr>
+        <p:txBody>
+          <a:bodyPr/>
+          <a:p/>
+        </p:txBody>
       </p:sp>
       <p:sp>
         <p:nvSpPr>
@@ -13451,6 +14063,10 @@
             <a:prstDash val="solid"/>
           </a:ln>
         </p:spPr>
+        <p:txBody>
+          <a:bodyPr/>
+          <a:p/>
+        </p:txBody>
       </p:sp>
       <p:sp>
         <p:nvSpPr>
@@ -13604,6 +14220,10 @@
             </a:outerShdw>
           </a:effectLst>
         </p:spPr>
+        <p:txBody>
+          <a:bodyPr/>
+          <a:p/>
+        </p:txBody>
       </p:sp>
       <p:sp>
         <p:nvSpPr>
@@ -13631,6 +14251,10 @@
             <a:prstDash val="solid"/>
           </a:ln>
         </p:spPr>
+        <p:txBody>
+          <a:bodyPr/>
+          <a:p/>
+        </p:txBody>
       </p:sp>
       <p:sp>
         <p:nvSpPr>
@@ -13784,6 +14408,10 @@
             </a:outerShdw>
           </a:effectLst>
         </p:spPr>
+        <p:txBody>
+          <a:bodyPr/>
+          <a:p/>
+        </p:txBody>
       </p:sp>
       <p:sp>
         <p:nvSpPr>
@@ -13850,6 +14478,10 @@
             <a:prstDash val="solid"/>
           </a:ln>
         </p:spPr>
+        <p:txBody>
+          <a:bodyPr/>
+          <a:p/>
+        </p:txBody>
       </p:sp>
       <p:sp>
         <p:nvSpPr>
@@ -13918,6 +14550,10 @@
             <a:prstDash val="solid"/>
           </a:ln>
         </p:spPr>
+        <p:txBody>
+          <a:bodyPr/>
+          <a:p/>
+        </p:txBody>
       </p:sp>
       <p:sp>
         <p:nvSpPr>
@@ -13986,6 +14622,10 @@
             <a:prstDash val="solid"/>
           </a:ln>
         </p:spPr>
+        <p:txBody>
+          <a:bodyPr/>
+          <a:p/>
+        </p:txBody>
       </p:sp>
       <p:sp>
         <p:nvSpPr>
@@ -14054,6 +14694,10 @@
             <a:prstDash val="solid"/>
           </a:ln>
         </p:spPr>
+        <p:txBody>
+          <a:bodyPr/>
+          <a:p/>
+        </p:txBody>
       </p:sp>
       <p:sp>
         <p:nvSpPr>
@@ -14193,6 +14837,10 @@
             <a:prstDash val="solid"/>
           </a:ln>
         </p:spPr>
+        <p:txBody>
+          <a:bodyPr/>
+          <a:p/>
+        </p:txBody>
       </p:sp>
       <p:sp>
         <p:nvSpPr>
@@ -14222,6 +14870,10 @@
             <a:prstDash val="solid"/>
           </a:ln>
         </p:spPr>
+        <p:txBody>
+          <a:bodyPr/>
+          <a:p/>
+        </p:txBody>
       </p:sp>
       <p:sp>
         <p:nvSpPr>
@@ -14251,6 +14903,10 @@
             <a:prstDash val="solid"/>
           </a:ln>
         </p:spPr>
+        <p:txBody>
+          <a:bodyPr/>
+          <a:p/>
+        </p:txBody>
       </p:sp>
       <p:sp>
         <p:nvSpPr>
@@ -14280,6 +14936,10 @@
             <a:prstDash val="solid"/>
           </a:ln>
         </p:spPr>
+        <p:txBody>
+          <a:bodyPr/>
+          <a:p/>
+        </p:txBody>
       </p:sp>
       <p:sp>
         <p:nvSpPr>
@@ -14502,6 +15162,10 @@
             <a:prstDash val="solid"/>
           </a:ln>
         </p:spPr>
+        <p:txBody>
+          <a:bodyPr/>
+          <a:p/>
+        </p:txBody>
       </p:sp>
       <p:sp>
         <p:nvSpPr>
@@ -14538,6 +15202,10 @@
             </a:outerShdw>
           </a:effectLst>
         </p:spPr>
+        <p:txBody>
+          <a:bodyPr/>
+          <a:p/>
+        </p:txBody>
       </p:sp>
       <p:sp>
         <p:nvSpPr>
@@ -14565,6 +15233,10 @@
             <a:prstDash val="solid"/>
           </a:ln>
         </p:spPr>
+        <p:txBody>
+          <a:bodyPr/>
+          <a:p/>
+        </p:txBody>
       </p:sp>
       <p:sp>
         <p:nvSpPr>
@@ -14594,6 +15266,10 @@
             <a:prstDash val="solid"/>
           </a:ln>
         </p:spPr>
+        <p:txBody>
+          <a:bodyPr/>
+          <a:p/>
+        </p:txBody>
       </p:sp>
       <p:sp>
         <p:nvSpPr>
@@ -14749,6 +15425,10 @@
             </a:outerShdw>
           </a:effectLst>
         </p:spPr>
+        <p:txBody>
+          <a:bodyPr/>
+          <a:p/>
+        </p:txBody>
       </p:sp>
       <p:sp>
         <p:nvSpPr>
@@ -14776,6 +15456,10 @@
             <a:prstDash val="solid"/>
           </a:ln>
         </p:spPr>
+        <p:txBody>
+          <a:bodyPr/>
+          <a:p/>
+        </p:txBody>
       </p:sp>
       <p:sp>
         <p:nvSpPr>
@@ -14805,6 +15489,10 @@
             <a:prstDash val="solid"/>
           </a:ln>
         </p:spPr>
+        <p:txBody>
+          <a:bodyPr/>
+          <a:p/>
+        </p:txBody>
       </p:sp>
       <p:sp>
         <p:nvSpPr>
@@ -14960,6 +15648,10 @@
             </a:outerShdw>
           </a:effectLst>
         </p:spPr>
+        <p:txBody>
+          <a:bodyPr/>
+          <a:p/>
+        </p:txBody>
       </p:sp>
       <p:sp>
         <p:nvSpPr>
@@ -14987,6 +15679,10 @@
             <a:prstDash val="solid"/>
           </a:ln>
         </p:spPr>
+        <p:txBody>
+          <a:bodyPr/>
+          <a:p/>
+        </p:txBody>
       </p:sp>
       <p:sp>
         <p:nvSpPr>
@@ -15016,6 +15712,10 @@
             <a:prstDash val="solid"/>
           </a:ln>
         </p:spPr>
+        <p:txBody>
+          <a:bodyPr/>
+          <a:p/>
+        </p:txBody>
       </p:sp>
       <p:sp>
         <p:nvSpPr>
@@ -15171,6 +15871,10 @@
             </a:outerShdw>
           </a:effectLst>
         </p:spPr>
+        <p:txBody>
+          <a:bodyPr/>
+          <a:p/>
+        </p:txBody>
       </p:sp>
       <p:sp>
         <p:nvSpPr>
@@ -15198,6 +15902,10 @@
             <a:prstDash val="solid"/>
           </a:ln>
         </p:spPr>
+        <p:txBody>
+          <a:bodyPr/>
+          <a:p/>
+        </p:txBody>
       </p:sp>
       <p:sp>
         <p:nvSpPr>
@@ -15227,6 +15935,10 @@
             <a:prstDash val="solid"/>
           </a:ln>
         </p:spPr>
+        <p:txBody>
+          <a:bodyPr/>
+          <a:p/>
+        </p:txBody>
       </p:sp>
       <p:sp>
         <p:nvSpPr>
@@ -15382,6 +16094,10 @@
             </a:outerShdw>
           </a:effectLst>
         </p:spPr>
+        <p:txBody>
+          <a:bodyPr/>
+          <a:p/>
+        </p:txBody>
       </p:sp>
       <p:sp>
         <p:nvSpPr>
@@ -15409,6 +16125,10 @@
             <a:prstDash val="solid"/>
           </a:ln>
         </p:spPr>
+        <p:txBody>
+          <a:bodyPr/>
+          <a:p/>
+        </p:txBody>
       </p:sp>
       <p:sp>
         <p:nvSpPr>
@@ -15438,6 +16158,10 @@
             <a:prstDash val="solid"/>
           </a:ln>
         </p:spPr>
+        <p:txBody>
+          <a:bodyPr/>
+          <a:p/>
+        </p:txBody>
       </p:sp>
       <p:sp>
         <p:nvSpPr>
@@ -15584,6 +16308,10 @@
             <a:prstDash val="solid"/>
           </a:ln>
         </p:spPr>
+        <p:txBody>
+          <a:bodyPr/>
+          <a:p/>
+        </p:txBody>
       </p:sp>
       <p:sp>
         <p:nvSpPr>
